--- a/sample/graph7.pptx
+++ b/sample/graph7.pptx
@@ -488,7 +488,7 @@
               </a:lnSpc>
             </a:pPr>
             <a:r>
-              <a:rPr lang="ja-JP" altLang="en-US" sz="1450">
+              <a:rPr lang="ja-JP" altLang="en-US" sz="1400">
                 <a:solidFill>
                   <a:srgbClr val="333333"/>
                 </a:solidFill>
@@ -529,7 +529,7 @@
               </a:lnSpc>
             </a:pPr>
             <a:r>
-              <a:rPr lang="ja-JP" altLang="en-US" sz="1450" b="1">
+              <a:rPr lang="ja-JP" altLang="en-US" sz="1400" b="1">
                 <a:solidFill>
                   <a:srgbClr val="333333"/>
                 </a:solidFill>
@@ -570,7 +570,7 @@
               </a:lnSpc>
             </a:pPr>
             <a:r>
-              <a:rPr lang="ja-JP" altLang="en-US" sz="1450">
+              <a:rPr lang="ja-JP" altLang="en-US" sz="1400">
                 <a:solidFill>
                   <a:srgbClr val="333333"/>
                 </a:solidFill>
@@ -611,7 +611,7 @@
               </a:lnSpc>
             </a:pPr>
             <a:r>
-              <a:rPr lang="ja-JP" altLang="en-US" sz="1450" b="1">
+              <a:rPr lang="ja-JP" altLang="en-US" sz="1400" b="1">
                 <a:solidFill>
                   <a:srgbClr val="333333"/>
                 </a:solidFill>
@@ -652,7 +652,7 @@
               </a:lnSpc>
             </a:pPr>
             <a:r>
-              <a:rPr lang="ja-JP" altLang="en-US" sz="1450">
+              <a:rPr lang="ja-JP" altLang="en-US" sz="1400">
                 <a:solidFill>
                   <a:srgbClr val="333333"/>
                 </a:solidFill>
@@ -693,7 +693,7 @@
               </a:lnSpc>
             </a:pPr>
             <a:r>
-              <a:rPr lang="ja-JP" altLang="en-US" sz="1450">
+              <a:rPr lang="ja-JP" altLang="en-US" sz="1400">
                 <a:solidFill>
                   <a:srgbClr val="333333"/>
                 </a:solidFill>
@@ -734,7 +734,7 @@
               </a:lnSpc>
             </a:pPr>
             <a:r>
-              <a:rPr lang="ja-JP" altLang="en-US" sz="1450" b="1">
+              <a:rPr lang="ja-JP" altLang="en-US" sz="1400" b="1">
                 <a:solidFill>
                   <a:srgbClr val="333333"/>
                 </a:solidFill>
@@ -775,7 +775,7 @@
               </a:lnSpc>
             </a:pPr>
             <a:r>
-              <a:rPr lang="ja-JP" altLang="en-US" sz="1450">
+              <a:rPr lang="ja-JP" altLang="en-US" sz="1400">
                 <a:solidFill>
                   <a:srgbClr val="333333"/>
                 </a:solidFill>
@@ -816,7 +816,7 @@
               </a:lnSpc>
             </a:pPr>
             <a:r>
-              <a:rPr lang="ja-JP" altLang="en-US" sz="1450">
+              <a:rPr lang="ja-JP" altLang="en-US" sz="1400">
                 <a:solidFill>
                   <a:srgbClr val="333333"/>
                 </a:solidFill>
@@ -857,7 +857,7 @@
               </a:lnSpc>
             </a:pPr>
             <a:r>
-              <a:rPr lang="ja-JP" altLang="en-US" sz="1450" b="1">
+              <a:rPr lang="ja-JP" altLang="en-US" sz="1400" b="1">
                 <a:solidFill>
                   <a:srgbClr val="333333"/>
                 </a:solidFill>
@@ -898,7 +898,7 @@
               </a:lnSpc>
             </a:pPr>
             <a:r>
-              <a:rPr lang="ja-JP" altLang="en-US" sz="1450">
+              <a:rPr lang="ja-JP" altLang="en-US" sz="1400">
                 <a:solidFill>
                   <a:srgbClr val="333333"/>
                 </a:solidFill>
@@ -939,7 +939,7 @@
               </a:lnSpc>
             </a:pPr>
             <a:r>
-              <a:rPr lang="ja-JP" altLang="en-US" sz="1450">
+              <a:rPr lang="ja-JP" altLang="en-US" sz="1400">
                 <a:solidFill>
                   <a:srgbClr val="333333"/>
                 </a:solidFill>
